--- a/public/downloads/Vodaria_RFx_Kickoff_Pack.pptx
+++ b/public/downloads/Vodaria_RFx_Kickoff_Pack.pptx
@@ -2025,7 +2025,7 @@
                   <a:srgbClr val="F28C28"/>
                 </a:solidFill>
               </a:rPr>
-              <a:t xml:space="preserve">Vodaria Group · Converged BSS Transformation</a:t>
+              <a:t>Vodaria Group · Converged BSS Transformation</a:t>
             </a:r>
             <a:endParaRPr lang="en-US" sz="1600" dirty="0"/>
           </a:p>
@@ -2203,7 +2203,7 @@
                   <a:srgbClr val="AFC2D0"/>
                 </a:solidFill>
               </a:rPr>
-              <a:t xml:space="preserve">Internal template | October 2026</a:t>
+              <a:t>Internal template | October 2026</a:t>
             </a:r>
             <a:endParaRPr lang="en-US" sz="1000" dirty="0"/>
           </a:p>
@@ -2257,7 +2257,7 @@
                   <a:srgbClr val="657786"/>
                 </a:solidFill>
               </a:rPr>
-              <a:t xml:space="preserve">Vodaria Group — Converged BSS Transformation (RFP OPP-24-0981)</a:t>
+              <a:t>Vodaria Group — Converged BSS Transformation (RFP OPP-24-0981)</a:t>
             </a:r>
           </a:p>
         </p:txBody>
@@ -3943,7 +3943,7 @@
                   <a:srgbClr val="657786"/>
                 </a:solidFill>
               </a:rPr>
-              <a:t xml:space="preserve">Vodaria Group, a tier-1 converged operator, has issued an RFP to replace fragmented legacy BSS with a single cloud-native create–sell–deliver platform across B2C and B2B.</a:t>
+              <a:t>Vodaria Group, a tier-1 converged operator, has issued an RFP to replace fragmented legacy BSS with a single cloud-native create–sell–deliver platform across B2C and B2B.</a:t>
             </a:r>
             <a:endParaRPr lang="en-US" sz="1200" dirty="0"/>
           </a:p>
@@ -4087,15 +4087,15 @@
                   <a:srgbClr val="213547"/>
                 </a:solidFill>
               </a:rPr>
-              <a:t xml:space="preserve">Tier-1 converged operator: fixed, mobile and enterprise across 6 EU markets, ~28M subscribersGroup strategy targets B2B growth and 5G SA monetisation by 2028Six product catalogues, manual quote-to-order and 10-day tariff launches</a:t>
+              <a:t>Tier-1 converged operator: fixed, mobile and enterprise across 6 EU markets, ~28M subscribers</a:t>
             </a:r>
             <a:br/>
             <a:r>
-              <a:t/>
+              <a:t>Group strategy targets B2B growth and 5G SA monetisation by 2028</a:t>
             </a:r>
             <a:br/>
             <a:r>
-              <a:t/>
+              <a:t>Six product catalogues, manual quote-to-order and 10-day tariff launches</a:t>
             </a:r>
             <a:endParaRPr lang="en-US" sz="1050" dirty="0"/>
           </a:p>
@@ -4239,15 +4239,15 @@
                   <a:srgbClr val="213547"/>
                 </a:solidFill>
               </a:rPr>
-              <a:t xml:space="preserve">Single catalogue-driven lead-to-cash model across B2C, B2B and convergedZero-touch order flow-through above 90%; tariff launch in under 5 daysRetain Salesforce CRM and SAP ERP; replace legacy CPQ, order management, charging and billing</a:t>
+              <a:t>Single catalogue-driven lead-to-cash model across B2C, B2B and converged</a:t>
             </a:r>
             <a:br/>
             <a:r>
-              <a:t/>
+              <a:t>Zero-touch order flow-through above 90%; tariff launch in under 5 days</a:t>
             </a:r>
             <a:br/>
             <a:r>
-              <a:t/>
+              <a:t>Retain Salesforce CRM and SAP ERP; replace legacy CPQ, order management, charging and billing</a:t>
             </a:r>
             <a:endParaRPr lang="en-US" sz="1050" dirty="0"/>
           </a:p>
@@ -4391,15 +4391,15 @@
                   <a:srgbClr val="213547"/>
                 </a:solidFill>
               </a:rPr>
-              <a:t xml:space="preserve">Faster time-to-market, lower cost-to-serve, converged customer experienceProven tier-1 delivery with a phased, low-risk migrationEU sovereign hosting and certified TM Forum Open APIs are mandatory</a:t>
+              <a:t>Faster time-to-market, lower cost-to-serve, converged customer experience</a:t>
             </a:r>
             <a:br/>
             <a:r>
-              <a:t/>
+              <a:t>Proven tier-1 delivery with a phased, low-risk migration</a:t>
             </a:r>
             <a:br/>
             <a:r>
-              <a:t/>
+              <a:t>EU sovereign hosting and certified TM Forum Open APIs are mandatory</a:t>
             </a:r>
             <a:endParaRPr lang="en-US" sz="1050" dirty="0"/>
           </a:p>
@@ -4498,7 +4498,7 @@
                   <a:srgbClr val="657786"/>
                 </a:solidFill>
               </a:rPr>
-              <a:t xml:space="preserve">Vodaria Group — Converged BSS Transformation (RFP OPP-24-0981)</a:t>
+              <a:t>Vodaria Group — Converged BSS Transformation (RFP OPP-24-0981)</a:t>
             </a:r>
           </a:p>
         </p:txBody>
@@ -4738,31 +4738,31 @@
                   <a:srgbClr val="213547"/>
                 </a:solidFill>
               </a:rPr>
-              <a:t xml:space="preserve">Product Catalog (B2C, B2B, converged)Configure Price Quote (CPQ)Order Management &amp; decompositionConverged online charging (5G SA CHF)Convergent billingOperational visibility &amp; fallout managementTMF Open API integration, migration, testing and managed service</a:t>
+              <a:t>Product Catalog (B2C, B2B, converged)</a:t>
             </a:r>
             <a:br/>
             <a:r>
-              <a:t/>
+              <a:t>Configure Price Quote (CPQ)</a:t>
             </a:r>
             <a:br/>
             <a:r>
-              <a:t/>
+              <a:t>Order Management &amp; decomposition</a:t>
             </a:r>
             <a:br/>
             <a:r>
-              <a:t/>
+              <a:t>Converged online charging (5G SA CHF)</a:t>
             </a:r>
             <a:br/>
             <a:r>
-              <a:t/>
+              <a:t>Convergent billing</a:t>
             </a:r>
             <a:br/>
             <a:r>
-              <a:t/>
+              <a:t>Operational visibility &amp; fallout management</a:t>
             </a:r>
             <a:br/>
             <a:r>
-              <a:t/>
+              <a:t>TMF Open API integration, migration, testing and managed service</a:t>
             </a:r>
             <a:endParaRPr lang="en-US" sz="1050" dirty="0"/>
           </a:p>
@@ -4906,23 +4906,23 @@
                   <a:srgbClr val="213547"/>
                 </a:solidFill>
               </a:rPr>
-              <a:t xml:space="preserve">Salesforce CRM (customer system of record)SAP ERP finance programmeNetwork inventory (Vodaria NetCracker instance)Payment gateway and print-stream partner (AFP)AI root-cause roadmap item (2027) — subject to Product approval</a:t>
+              <a:t>Salesforce CRM (customer system of record)</a:t>
             </a:r>
             <a:br/>
             <a:r>
-              <a:t/>
+              <a:t>SAP ERP finance programme</a:t>
             </a:r>
             <a:br/>
             <a:r>
-              <a:t/>
+              <a:t>Network inventory (Vodaria NetCracker instance)</a:t>
             </a:r>
             <a:br/>
             <a:r>
-              <a:t/>
+              <a:t>Payment gateway and print-stream partner (AFP)</a:t>
             </a:r>
             <a:br/>
             <a:r>
-              <a:t/>
+              <a:t>AI root-cause roadmap item (2027) — subject to Product approval</a:t>
             </a:r>
             <a:endParaRPr lang="en-US" sz="1050" dirty="0"/>
           </a:p>
@@ -5066,23 +5066,23 @@
                   <a:srgbClr val="213547"/>
                 </a:solidFill>
               </a:rPr>
-              <a:t xml:space="preserve">CRM replacementNetwork provisioning / activationMainframe AFP print generation (partner-led)Data cleansing of legacy source systemsHardware procurement</a:t>
+              <a:t>CRM replacement</a:t>
             </a:r>
             <a:br/>
             <a:r>
-              <a:t/>
+              <a:t>Network provisioning / activation</a:t>
             </a:r>
             <a:br/>
             <a:r>
-              <a:t/>
+              <a:t>Mainframe AFP print generation (partner-led)</a:t>
             </a:r>
             <a:br/>
             <a:r>
-              <a:t/>
+              <a:t>Data cleansing of legacy source systems</a:t>
             </a:r>
             <a:br/>
             <a:r>
-              <a:t/>
+              <a:t>Hardware procurement</a:t>
             </a:r>
             <a:endParaRPr lang="en-US" sz="1050" dirty="0"/>
           </a:p>
@@ -5224,7 +5224,7 @@
                   <a:srgbClr val="657786"/>
                 </a:solidFill>
               </a:rPr>
-              <a:t xml:space="preserve">Hansen Catalog, CPQ, Order Management and Charging form a single cloud-native BSS core, integrated with Vodaria's retained Salesforce CRM via TMF Open APIs and events.</a:t>
+              <a:t>Hansen Catalog, CPQ, Order Management and Charging form a single cloud-native BSS core, integrated with Vodaria's retained Salesforce CRM via TMF Open APIs and events.</a:t>
             </a:r>
             <a:endParaRPr lang="en-US" sz="1200" dirty="0"/>
           </a:p>
@@ -5296,7 +5296,7 @@
                   <a:srgbClr val="102C45"/>
                 </a:solidFill>
               </a:rPr>
-              <a:t xml:space="preserve">Salesforce CRM</a:t>
+              <a:t>Salesforce CRM</a:t>
             </a:r>
             <a:endParaRPr lang="en-US" sz="1100" dirty="0"/>
           </a:p>
@@ -5816,7 +5816,7 @@
                   <a:srgbClr val="102C45"/>
                 </a:solidFill>
               </a:rPr>
-              <a:t xml:space="preserve">SAP ERP · Network inventory · Payments</a:t>
+              <a:t>SAP ERP · Network inventory · Payments</a:t>
             </a:r>
             <a:endParaRPr lang="en-US" sz="1100" dirty="0"/>
           </a:p>
@@ -6727,7 +6727,7 @@
                             <a:srgbClr val="213547"/>
                           </a:solidFill>
                         </a:rPr>
-                        <a:t xml:space="preserve">Salesforce remains system of record; integrate via TMF620/648/622 APIs.</a:t>
+                        <a:t>Salesforce remains system of record; integrate via TMF620/648/622 APIs.</a:t>
                       </a:r>
                     </a:p>
                   </a:txBody>
@@ -6913,7 +6913,7 @@
                             <a:srgbClr val="213547"/>
                           </a:solidFill>
                         </a:rPr>
-                        <a:t xml:space="preserve">SAP ERP and network inventory interfaces owned by Vodaria IT; availability to confirm.</a:t>
+                        <a:t>SAP ERP and network inventory interfaces owned by Vodaria IT; availability to confirm.</a:t>
                       </a:r>
                     </a:p>
                   </a:txBody>
@@ -7099,7 +7099,7 @@
                             <a:srgbClr val="213547"/>
                           </a:solidFill>
                         </a:rPr>
-                        <a:t xml:space="preserve">8-week discovery, then fixed-scope phases with joint change board.</a:t>
+                        <a:t>8-week discovery, then fixed-scope phases with joint change board.</a:t>
                       </a:r>
                     </a:p>
                   </a:txBody>
@@ -7285,7 +7285,7 @@
                             <a:srgbClr val="213547"/>
                           </a:solidFill>
                         </a:rPr>
-                        <a:t xml:space="preserve">EU sovereign cloud (Frankfurt), 4 environments, 24x7 L2/L3 support.</a:t>
+                        <a:t>EU sovereign cloud (Frankfurt), 4 environments, 24x7 L2/L3 support.</a:t>
                       </a:r>
                     </a:p>
                   </a:txBody>
@@ -7471,7 +7471,7 @@
                             <a:srgbClr val="213547"/>
                           </a:solidFill>
                         </a:rPr>
-                        <a:t xml:space="preserve">MCP interface for AI agents; AI root-cause is roadmap (2027).</a:t>
+                        <a:t>MCP interface for AI agents; AI root-cause is roadmap (2027).</a:t>
                       </a:r>
                     </a:p>
                   </a:txBody>
@@ -7657,7 +7657,7 @@
                             <a:srgbClr val="213547"/>
                           </a:solidFill>
                         </a:rPr>
-                        <a:t xml:space="preserve">Hansen SIT; Vodaria UAT with masked production data and named approvers.</a:t>
+                        <a:t>Hansen SIT; Vodaria UAT with masked production data and named approvers.</a:t>
                       </a:r>
                     </a:p>
                   </a:txBody>
@@ -9948,7 +9948,7 @@
                   <a:srgbClr val="102C45"/>
                 </a:solidFill>
               </a:rPr>
-              <a:t xml:space="preserve">19 October 2026</a:t>
+              <a:t>02 Oct 2026</a:t>
             </a:r>
             <a:endParaRPr lang="en-US" sz="1100" dirty="0"/>
           </a:p>
@@ -10054,7 +10054,7 @@
                   <a:srgbClr val="102C45"/>
                 </a:solidFill>
               </a:rPr>
-              <a:t xml:space="preserve">19 October 2026</a:t>
+              <a:t>10 Oct 2026</a:t>
             </a:r>
             <a:endParaRPr lang="en-US" sz="1100" dirty="0"/>
           </a:p>
@@ -10160,7 +10160,7 @@
                   <a:srgbClr val="102C45"/>
                 </a:solidFill>
               </a:rPr>
-              <a:t xml:space="preserve">19 October 2026</a:t>
+              <a:t>28 Oct 2026</a:t>
             </a:r>
             <a:endParaRPr lang="en-US" sz="1100" dirty="0"/>
           </a:p>
@@ -10266,7 +10266,7 @@
                   <a:srgbClr val="102C45"/>
                 </a:solidFill>
               </a:rPr>
-              <a:t xml:space="preserve">19 October 2026</a:t>
+              <a:t>06 Nov 2026</a:t>
             </a:r>
             <a:endParaRPr lang="en-US" sz="1100" dirty="0"/>
           </a:p>
@@ -10372,7 +10372,7 @@
                   <a:srgbClr val="102C45"/>
                 </a:solidFill>
               </a:rPr>
-              <a:t xml:space="preserve">19 October 2026</a:t>
+              <a:t>10 Nov 2026</a:t>
             </a:r>
             <a:endParaRPr lang="en-US" sz="1100" dirty="0"/>
           </a:p>
@@ -10478,7 +10478,7 @@
                   <a:srgbClr val="102C45"/>
                 </a:solidFill>
               </a:rPr>
-              <a:t xml:space="preserve">19 October 2026</a:t>
+              <a:t>13 Nov 2026</a:t>
             </a:r>
             <a:endParaRPr lang="en-US" sz="1100" dirty="0"/>
           </a:p>
@@ -10584,7 +10584,7 @@
                   <a:srgbClr val="102C45"/>
                 </a:solidFill>
               </a:rPr>
-              <a:t xml:space="preserve">19 October 2026</a:t>
+              <a:t>11 Nov 2026</a:t>
             </a:r>
             <a:endParaRPr lang="en-US" sz="1100" dirty="0"/>
           </a:p>
@@ -10690,7 +10690,7 @@
                   <a:srgbClr val="102C45"/>
                 </a:solidFill>
               </a:rPr>
-              <a:t xml:space="preserve">19 October 2026</a:t>
+              <a:t>02 Dec 2026</a:t>
             </a:r>
             <a:endParaRPr lang="en-US" sz="1100" dirty="0"/>
           </a:p>

--- a/public/downloads/Vodaria_RFx_Kickoff_Pack.pptx
+++ b/public/downloads/Vodaria_RFx_Kickoff_Pack.pptx
@@ -2065,6 +2065,11 @@
             </a:r>
             <a:br/>
             <a:r>
+              <a:rPr sz="3600" b="1">
+                <a:solidFill>
+                  <a:srgbClr val="FFFFFF"/>
+                </a:solidFill>
+              </a:rPr>
               <a:t>kick-off pack</a:t>
             </a:r>
             <a:endParaRPr lang="en-US" sz="3600" dirty="0"/>
@@ -2877,18 +2882,38 @@
             </a:r>
             <a:br/>
             <a:r>
+              <a:rPr sz="1050">
+                <a:solidFill>
+                  <a:srgbClr val="213547"/>
+                </a:solidFill>
+              </a:rPr>
               <a:t>Confirm function leads and WBS ownership</a:t>
             </a:r>
             <a:br/>
             <a:r>
+              <a:rPr sz="1050">
+                <a:solidFill>
+                  <a:srgbClr val="213547"/>
+                </a:solidFill>
+              </a:rPr>
               <a:t>Validate milestone and gate dates</a:t>
             </a:r>
             <a:br/>
             <a:r>
+              <a:rPr sz="1050">
+                <a:solidFill>
+                  <a:srgbClr val="213547"/>
+                </a:solidFill>
+              </a:rPr>
               <a:t>Assign assumptions and clarification questions</a:t>
             </a:r>
             <a:br/>
             <a:r>
+              <a:rPr sz="1050">
+                <a:solidFill>
+                  <a:srgbClr val="213547"/>
+                </a:solidFill>
+              </a:rPr>
               <a:t>Confirm next cadence and first deliverables</a:t>
             </a:r>
             <a:endParaRPr lang="en-US" sz="1050" dirty="0"/>
@@ -4091,10 +4116,20 @@
             </a:r>
             <a:br/>
             <a:r>
+              <a:rPr sz="1050">
+                <a:solidFill>
+                  <a:srgbClr val="213547"/>
+                </a:solidFill>
+              </a:rPr>
               <a:t>Group strategy targets B2B growth and 5G SA monetisation by 2028</a:t>
             </a:r>
             <a:br/>
             <a:r>
+              <a:rPr sz="1050">
+                <a:solidFill>
+                  <a:srgbClr val="213547"/>
+                </a:solidFill>
+              </a:rPr>
               <a:t>Six product catalogues, manual quote-to-order and 10-day tariff launches</a:t>
             </a:r>
             <a:endParaRPr lang="en-US" sz="1050" dirty="0"/>
@@ -4243,10 +4278,20 @@
             </a:r>
             <a:br/>
             <a:r>
+              <a:rPr sz="1050">
+                <a:solidFill>
+                  <a:srgbClr val="213547"/>
+                </a:solidFill>
+              </a:rPr>
               <a:t>Zero-touch order flow-through above 90%; tariff launch in under 5 days</a:t>
             </a:r>
             <a:br/>
             <a:r>
+              <a:rPr sz="1050">
+                <a:solidFill>
+                  <a:srgbClr val="213547"/>
+                </a:solidFill>
+              </a:rPr>
               <a:t>Retain Salesforce CRM and SAP ERP; replace legacy CPQ, order management, charging and billing</a:t>
             </a:r>
             <a:endParaRPr lang="en-US" sz="1050" dirty="0"/>
@@ -4395,10 +4440,20 @@
             </a:r>
             <a:br/>
             <a:r>
+              <a:rPr sz="1050">
+                <a:solidFill>
+                  <a:srgbClr val="213547"/>
+                </a:solidFill>
+              </a:rPr>
               <a:t>Proven tier-1 delivery with a phased, low-risk migration</a:t>
             </a:r>
             <a:br/>
             <a:r>
+              <a:rPr sz="1050">
+                <a:solidFill>
+                  <a:srgbClr val="213547"/>
+                </a:solidFill>
+              </a:rPr>
               <a:t>EU sovereign hosting and certified TM Forum Open APIs are mandatory</a:t>
             </a:r>
             <a:endParaRPr lang="en-US" sz="1050" dirty="0"/>
@@ -4742,26 +4797,56 @@
             </a:r>
             <a:br/>
             <a:r>
+              <a:rPr sz="1050">
+                <a:solidFill>
+                  <a:srgbClr val="213547"/>
+                </a:solidFill>
+              </a:rPr>
               <a:t>Configure Price Quote (CPQ)</a:t>
             </a:r>
             <a:br/>
             <a:r>
+              <a:rPr sz="1050">
+                <a:solidFill>
+                  <a:srgbClr val="213547"/>
+                </a:solidFill>
+              </a:rPr>
               <a:t>Order Management &amp; decomposition</a:t>
             </a:r>
             <a:br/>
             <a:r>
+              <a:rPr sz="1050">
+                <a:solidFill>
+                  <a:srgbClr val="213547"/>
+                </a:solidFill>
+              </a:rPr>
               <a:t>Converged online charging (5G SA CHF)</a:t>
             </a:r>
             <a:br/>
             <a:r>
+              <a:rPr sz="1050">
+                <a:solidFill>
+                  <a:srgbClr val="213547"/>
+                </a:solidFill>
+              </a:rPr>
               <a:t>Convergent billing</a:t>
             </a:r>
             <a:br/>
             <a:r>
+              <a:rPr sz="1050">
+                <a:solidFill>
+                  <a:srgbClr val="213547"/>
+                </a:solidFill>
+              </a:rPr>
               <a:t>Operational visibility &amp; fallout management</a:t>
             </a:r>
             <a:br/>
             <a:r>
+              <a:rPr sz="1050">
+                <a:solidFill>
+                  <a:srgbClr val="213547"/>
+                </a:solidFill>
+              </a:rPr>
               <a:t>TMF Open API integration, migration, testing and managed service</a:t>
             </a:r>
             <a:endParaRPr lang="en-US" sz="1050" dirty="0"/>
@@ -4910,18 +4995,38 @@
             </a:r>
             <a:br/>
             <a:r>
+              <a:rPr sz="1050">
+                <a:solidFill>
+                  <a:srgbClr val="213547"/>
+                </a:solidFill>
+              </a:rPr>
               <a:t>SAP ERP finance programme</a:t>
             </a:r>
             <a:br/>
             <a:r>
+              <a:rPr sz="1050">
+                <a:solidFill>
+                  <a:srgbClr val="213547"/>
+                </a:solidFill>
+              </a:rPr>
               <a:t>Network inventory (Vodaria NetCracker instance)</a:t>
             </a:r>
             <a:br/>
             <a:r>
+              <a:rPr sz="1050">
+                <a:solidFill>
+                  <a:srgbClr val="213547"/>
+                </a:solidFill>
+              </a:rPr>
               <a:t>Payment gateway and print-stream partner (AFP)</a:t>
             </a:r>
             <a:br/>
             <a:r>
+              <a:rPr sz="1050">
+                <a:solidFill>
+                  <a:srgbClr val="213547"/>
+                </a:solidFill>
+              </a:rPr>
               <a:t>AI root-cause roadmap item (2027) — subject to Product approval</a:t>
             </a:r>
             <a:endParaRPr lang="en-US" sz="1050" dirty="0"/>
@@ -5070,18 +5175,38 @@
             </a:r>
             <a:br/>
             <a:r>
+              <a:rPr sz="1050">
+                <a:solidFill>
+                  <a:srgbClr val="213547"/>
+                </a:solidFill>
+              </a:rPr>
               <a:t>Network provisioning / activation</a:t>
             </a:r>
             <a:br/>
             <a:r>
+              <a:rPr sz="1050">
+                <a:solidFill>
+                  <a:srgbClr val="213547"/>
+                </a:solidFill>
+              </a:rPr>
               <a:t>Mainframe AFP print generation (partner-led)</a:t>
             </a:r>
             <a:br/>
             <a:r>
+              <a:rPr sz="1050">
+                <a:solidFill>
+                  <a:srgbClr val="213547"/>
+                </a:solidFill>
+              </a:rPr>
               <a:t>Data cleansing of legacy source systems</a:t>
             </a:r>
             <a:br/>
             <a:r>
+              <a:rPr sz="1050">
+                <a:solidFill>
+                  <a:srgbClr val="213547"/>
+                </a:solidFill>
+              </a:rPr>
               <a:t>Hardware procurement</a:t>
             </a:r>
             <a:endParaRPr lang="en-US" sz="1050" dirty="0"/>
